--- a/evidence/2026-10-02/run-fair/raw/libreoffice/chart-data/measured-2.pptx
+++ b/evidence/2026-10-02/run-fair/raw/libreoffice/chart-data/measured-2.pptx
@@ -148,11 +148,11 @@
         </c:ser>
         <c:gapWidth val="150"/>
         <c:overlap val="0"/>
-        <c:axId val="44004865"/>
-        <c:axId val="19290142"/>
+        <c:axId val="66603562"/>
+        <c:axId val="44588721"/>
       </c:barChart>
       <c:catAx>
-        <c:axId val="44004865"/>
+        <c:axId val="66603562"/>
         <c:scaling>
           <c:orientation val="minMax"/>
         </c:scaling>
@@ -185,7 +185,7 @@
             </a:pPr>
           </a:p>
         </c:txPr>
-        <c:crossAx val="19290142"/>
+        <c:crossAx val="44588721"/>
         <c:crosses val="autoZero"/>
         <c:auto val="1"/>
         <c:lblAlgn val="ctr"/>
@@ -193,7 +193,7 @@
         <c:noMultiLvlLbl val="0"/>
       </c:catAx>
       <c:valAx>
-        <c:axId val="19290142"/>
+        <c:axId val="44588721"/>
         <c:scaling>
           <c:orientation val="minMax"/>
         </c:scaling>
@@ -236,7 +236,7 @@
             </a:pPr>
           </a:p>
         </c:txPr>
-        <c:crossAx val="44004865"/>
+        <c:crossAx val="66603562"/>
         <c:crosses val="autoZero"/>
         <c:crossBetween val="between"/>
       </c:valAx>
@@ -361,11 +361,11 @@
           </c:yVal>
           <c:smooth val="0"/>
         </c:ser>
-        <c:axId val="43680672"/>
-        <c:axId val="23650026"/>
+        <c:axId val="77984524"/>
+        <c:axId val="70995572"/>
       </c:scatterChart>
       <c:valAx>
-        <c:axId val="43680672"/>
+        <c:axId val="77984524"/>
         <c:scaling>
           <c:orientation val="minMax"/>
         </c:scaling>
@@ -398,12 +398,12 @@
             </a:pPr>
           </a:p>
         </c:txPr>
-        <c:crossAx val="23650026"/>
+        <c:crossAx val="70995572"/>
         <c:crosses val="autoZero"/>
         <c:crossBetween val="midCat"/>
       </c:valAx>
       <c:valAx>
-        <c:axId val="23650026"/>
+        <c:axId val="70995572"/>
         <c:scaling>
           <c:orientation val="minMax"/>
         </c:scaling>
@@ -446,7 +446,7 @@
             </a:pPr>
           </a:p>
         </c:txPr>
-        <c:crossAx val="43680672"/>
+        <c:crossAx val="77984524"/>
         <c:crosses val="autoZero"/>
         <c:crossBetween val="midCat"/>
       </c:valAx>
@@ -645,11 +645,11 @@
           </c:bubbleSize>
           <c:bubble3D val="0"/>
         </c:ser>
-        <c:axId val="98852163"/>
-        <c:axId val="71001695"/>
+        <c:axId val="98236031"/>
+        <c:axId val="16254648"/>
       </c:bubbleChart>
       <c:valAx>
-        <c:axId val="98852163"/>
+        <c:axId val="98236031"/>
         <c:scaling>
           <c:orientation val="minMax"/>
         </c:scaling>
@@ -682,12 +682,12 @@
             </a:pPr>
           </a:p>
         </c:txPr>
-        <c:crossAx val="71001695"/>
+        <c:crossAx val="16254648"/>
         <c:crosses val="autoZero"/>
         <c:crossBetween val="midCat"/>
       </c:valAx>
       <c:valAx>
-        <c:axId val="71001695"/>
+        <c:axId val="16254648"/>
         <c:scaling>
           <c:orientation val="minMax"/>
         </c:scaling>
@@ -730,7 +730,7 @@
             </a:pPr>
           </a:p>
         </c:txPr>
-        <c:crossAx val="98852163"/>
+        <c:crossAx val="98236031"/>
         <c:crosses val="autoZero"/>
         <c:crossBetween val="midCat"/>
       </c:valAx>
@@ -1731,7 +1731,7 @@
               </a:lnSpc>
               <a:buNone/>
             </a:pPr>
-            <a:fld id="{1E3D12F6-E6E7-4AB9-ACC4-8DB54B458DD4}" type="slidenum">
+            <a:fld id="{C8FD4586-E8C7-44B4-8FE1-65D6C13231BB}" type="slidenum">
               <a:rPr lang="en-US" sz="1200" b="0" u="none" strike="noStrike">
                 <a:solidFill>
                   <a:schemeClr val="dk1">
@@ -2443,7 +2443,7 @@
               </a:lnSpc>
               <a:buNone/>
             </a:pPr>
-            <a:fld id="{FCC8B273-9D60-4AB3-803F-08744BEFB70C}" type="slidenum">
+            <a:fld id="{5B7340D2-5979-445E-8968-EA382AC1ADED}" type="slidenum">
               <a:rPr lang="en-US" sz="1200" b="0" u="none" strike="noStrike">
                 <a:solidFill>
                   <a:schemeClr val="dk1">
@@ -2902,7 +2902,7 @@
               </a:lnSpc>
               <a:buNone/>
             </a:pPr>
-            <a:fld id="{FB2960D7-7CF3-4109-A3F3-190EA8251267}" type="slidenum">
+            <a:fld id="{4AE233BE-B1ED-40AE-B8B5-1B13D28325EA}" type="slidenum">
               <a:rPr lang="en-US" sz="1200" b="0" u="none" strike="noStrike">
                 <a:solidFill>
                   <a:schemeClr val="dk1">
@@ -3530,7 +3530,7 @@
               </a:lnSpc>
               <a:buNone/>
             </a:pPr>
-            <a:fld id="{D1844324-4BB3-4E73-A74A-FFB0518DC23F}" type="slidenum">
+            <a:fld id="{AB3CF1EE-FC02-49E1-9311-3FE456E04DB9}" type="slidenum">
               <a:rPr lang="en-US" sz="1200" b="0" u="none" strike="noStrike">
                 <a:solidFill>
                   <a:schemeClr val="dk1">
@@ -4158,7 +4158,7 @@
               </a:lnSpc>
               <a:buNone/>
             </a:pPr>
-            <a:fld id="{27CD9282-6E1F-4AA4-9399-ACAD637F4A85}" type="slidenum">
+            <a:fld id="{2B245569-0D49-4CCE-8532-1041F08040F4}" type="slidenum">
               <a:rPr lang="en-US" sz="1200" b="0" u="none" strike="noStrike">
                 <a:solidFill>
                   <a:schemeClr val="dk1">
@@ -4786,7 +4786,7 @@
               </a:lnSpc>
               <a:buNone/>
             </a:pPr>
-            <a:fld id="{B5558CC9-774C-4267-85DB-88C6DC51FA64}" type="slidenum">
+            <a:fld id="{D863B325-6CE2-48B3-9731-2581C78DCA76}" type="slidenum">
               <a:rPr lang="en-US" sz="1200" b="0" u="none" strike="noStrike">
                 <a:solidFill>
                   <a:schemeClr val="dk1">
@@ -5198,7 +5198,7 @@
               </a:lnSpc>
               <a:buNone/>
             </a:pPr>
-            <a:fld id="{D1C3D1CB-91F2-46BF-B841-E9B185160897}" type="slidenum">
+            <a:fld id="{DDB3D19B-DBB7-43D3-A8C3-556644F0292E}" type="slidenum">
               <a:rPr lang="en-US" sz="1200" b="0" u="none" strike="noStrike">
                 <a:solidFill>
                   <a:schemeClr val="dk1">
@@ -6132,7 +6132,7 @@
               </a:lnSpc>
               <a:buNone/>
             </a:pPr>
-            <a:fld id="{A66B6407-8F88-4230-9882-57AAC291F646}" type="slidenum">
+            <a:fld id="{196046C3-BAEA-4E12-824E-3277DB71231C}" type="slidenum">
               <a:rPr lang="en-US" sz="1200" b="0" u="none" strike="noStrike">
                 <a:solidFill>
                   <a:schemeClr val="dk1">
@@ -7294,7 +7294,7 @@
               </a:lnSpc>
               <a:buNone/>
             </a:pPr>
-            <a:fld id="{2ABC6D31-8893-41AB-AC98-F9FAD1081F91}" type="slidenum">
+            <a:fld id="{C9675FF2-3A92-44B6-A075-F1A3D3FA85C3}" type="slidenum">
               <a:rPr lang="en-US" sz="1200" b="0" u="none" strike="noStrike">
                 <a:solidFill>
                   <a:schemeClr val="dk1">
@@ -7616,7 +7616,7 @@
               </a:lnSpc>
               <a:buNone/>
             </a:pPr>
-            <a:fld id="{8A8F9C92-27FC-4829-AD60-ECBA22B86CFE}" type="slidenum">
+            <a:fld id="{9B7E2AB0-D14F-4877-9025-5CF177FBA6F5}" type="slidenum">
               <a:rPr lang="en-US" sz="1200" b="0" u="none" strike="noStrike">
                 <a:solidFill>
                   <a:schemeClr val="dk1">
@@ -7866,7 +7866,7 @@
               </a:lnSpc>
               <a:buNone/>
             </a:pPr>
-            <a:fld id="{BD6BD76E-8741-4B50-876A-E9C620E90620}" type="slidenum">
+            <a:fld id="{D9CF62B1-D40A-4B2B-8E9F-D5F750721F7D}" type="slidenum">
               <a:rPr lang="en-US" sz="1200" b="0" u="none" strike="noStrike">
                 <a:solidFill>
                   <a:schemeClr val="dk1">
